--- a/docs/submission/SagarDrishti_SIH2026_Idea.pptx
+++ b/docs/submission/SagarDrishti_SIH2026_Idea.pptx
@@ -5924,7 +5924,7 @@
                 </a:solidFill>
                 <a:latin typeface="Calibri"/>
               </a:rPr>
-              <a:t>Web-based 3D Visualization Platform for Ocean Model Data and In-situ Observations</a:t>
+              <a:t>Develop a web-based interactive 3D visualization platform that integrates numerical ocean model outputs and in-situ observations.</a:t>
             </a:r>
           </a:p>
           <a:p>
@@ -6208,7 +6208,7 @@
                 </a:solidFill>
                 <a:latin typeface="Calibri"/>
               </a:rPr>
-              <a:t>543 automated tests · 51 fps at 1080p on integrated graphics · 10.5 M gridded values · 16,390 QC-passed instrument levels · zero requests that leave the machine. Every figure in this deck was measured, not estimated.</a:t>
+              <a:t>567 automated tests · 51 fps at 1080p on integrated graphics · 10.5 M gridded values · 30,012 QC-passed instrument levels · zero requests that leave the machine. Every figure in this deck was measured, not estimated.</a:t>
             </a:r>
           </a:p>
         </p:txBody>
@@ -6984,7 +6984,7 @@
                 </a:solidFill>
                 <a:latin typeface="Calibri"/>
               </a:rPr>
-              <a:t>Instruments fused into the same scene.</a:t>
+              <a:t>All four instrument classes, in the same scene.</a:t>
             </a:r>
             <a:r>
               <a:rPr sz="900" b="0" i="0">
@@ -6993,7 +6993,7 @@
                 </a:solidFill>
                 <a:latin typeface="Calibri"/>
               </a:rPr>
-              <a:t>  25 real casts from 17 instruments; click one to read its measured profile against the model at that point and time.</a:t>
+              <a:t>  149 real casts from 19 instruments: Argo floats, BGC floats, a glider and shipboard CTD. Click one for its measured profile.</a:t>
             </a:r>
           </a:p>
           <a:p>
@@ -7916,7 +7916,7 @@
                 </a:solidFill>
                 <a:latin typeface="Calibri"/>
               </a:rPr>
-              <a:t>13 ocean parameters</a:t>
+              <a:t>13,622 levels REFUSED</a:t>
             </a:r>
             <a:r>
               <a:rPr sz="800" b="0" i="0">
@@ -7925,7 +7925,7 @@
                 </a:solidFill>
                 <a:latin typeface="Calibri"/>
               </a:rPr>
-              <a:t>  including oxygen, chlorophyll-a, nitrate and pH</a:t>
+              <a:t>  archive casts, too old to score honestly</a:t>
             </a:r>
           </a:p>
           <a:p>
@@ -9891,7 +9891,7 @@
                 </a:solidFill>
                 <a:latin typeface="Calibri"/>
               </a:rPr>
-              <a:t>10.5 M gridded values · 16,390 levels</a:t>
+              <a:t>10.5 M gridded values · 30,012 levels</a:t>
             </a:r>
           </a:p>
         </p:txBody>
@@ -13420,7 +13420,7 @@
                 </a:solidFill>
                 <a:latin typeface="Calibri"/>
               </a:rPr>
-              <a:t>543</a:t>
+              <a:t>548</a:t>
             </a:r>
           </a:p>
           <a:p>
@@ -13644,7 +13644,7 @@
                 </a:solidFill>
                 <a:latin typeface="Calibri"/>
               </a:rPr>
-              <a:t>16,390</a:t>
+              <a:t>30,012</a:t>
             </a:r>
           </a:p>
           <a:p>
@@ -13661,7 +13661,7 @@
                 <a:latin typeface="Calibri"/>
               </a:rPr>
               <a:t>QC-passed instrument levels
-from 17 real instruments</a:t>
+from 19 real instruments</a:t>
             </a:r>
           </a:p>
         </p:txBody>
@@ -21416,7 +21416,7 @@
                 </a:solidFill>
                 <a:latin typeface="Calibri"/>
               </a:rPr>
-              <a:t>543 automated tests; 10 of them drive a real browser through this exact demo, so the claims on these slides cannot rot silently.</a:t>
+              <a:t>567 automated tests; 11 of them drive a real browser through this exact demo, so the claims on these slides cannot rot silently.</a:t>
             </a:r>
           </a:p>
           <a:p>
